--- a/STARLAB_Slide_Decks_All/03_Research_Ethics_Safety_Integrity_2.0.pptx
+++ b/STARLAB_Slide_Decks_All/03_Research_Ethics_Safety_Integrity_2.0.pptx
@@ -2,43 +2,43 @@
 <file path=ppt/presentation.xml><?xml version="1.0" encoding="utf-8"?>
 <p:presentation xmlns:p="http://schemas.openxmlformats.org/presentationml/2006/main" embedTrueTypeFonts="1" saveSubsetFonts="0">
   <p:sldMasterIdLst>
-    <p:sldMasterId xmlns:r="http://schemas.openxmlformats.org/officeDocument/2006/relationships" id="2147483648" r:id="R2f7722a3a6bc4e53"/>
+    <p:sldMasterId xmlns:r="http://schemas.openxmlformats.org/officeDocument/2006/relationships" id="2147483648" r:id="R641d93ea96c04a7e"/>
   </p:sldMasterIdLst>
   <p:notesMasterIdLst>
-    <p:notesMasterId xmlns:r="http://schemas.openxmlformats.org/officeDocument/2006/relationships" r:id="Rec179a3384464c99"/>
+    <p:notesMasterId xmlns:r="http://schemas.openxmlformats.org/officeDocument/2006/relationships" r:id="Rae8fdca88c54433d"/>
   </p:notesMasterIdLst>
   <p:sldIdLst>
-    <p:sldId xmlns:r="http://schemas.openxmlformats.org/officeDocument/2006/relationships" id="256" r:id="Rf971b4f7858c4d3b"/>
-    <p:sldId xmlns:r="http://schemas.openxmlformats.org/officeDocument/2006/relationships" id="257" r:id="R3423346aab4a47f8"/>
-    <p:sldId xmlns:r="http://schemas.openxmlformats.org/officeDocument/2006/relationships" id="258" r:id="R0b6f8c34d083478d"/>
-    <p:sldId xmlns:r="http://schemas.openxmlformats.org/officeDocument/2006/relationships" id="259" r:id="R0fd11f16e6764378"/>
-    <p:sldId xmlns:r="http://schemas.openxmlformats.org/officeDocument/2006/relationships" id="260" r:id="Ra0802fd999a74702"/>
-    <p:sldId xmlns:r="http://schemas.openxmlformats.org/officeDocument/2006/relationships" id="261" r:id="Rf28e3c9568784807"/>
-    <p:sldId xmlns:r="http://schemas.openxmlformats.org/officeDocument/2006/relationships" id="262" r:id="R9496ec8037c74897"/>
-    <p:sldId xmlns:r="http://schemas.openxmlformats.org/officeDocument/2006/relationships" id="263" r:id="R1541c20edbba4a64"/>
-    <p:sldId xmlns:r="http://schemas.openxmlformats.org/officeDocument/2006/relationships" id="264" r:id="Rc741fa5412e642f3"/>
-    <p:sldId xmlns:r="http://schemas.openxmlformats.org/officeDocument/2006/relationships" id="265" r:id="R89e97d02bdff4148"/>
-    <p:sldId xmlns:r="http://schemas.openxmlformats.org/officeDocument/2006/relationships" id="266" r:id="R5c1b417f74704fe8"/>
-    <p:sldId xmlns:r="http://schemas.openxmlformats.org/officeDocument/2006/relationships" id="267" r:id="Re9b6ca6430f74665"/>
-    <p:sldId xmlns:r="http://schemas.openxmlformats.org/officeDocument/2006/relationships" id="268" r:id="Rebdc877e3b42415a"/>
-    <p:sldId xmlns:r="http://schemas.openxmlformats.org/officeDocument/2006/relationships" id="269" r:id="R8fde8790c209441e"/>
-    <p:sldId xmlns:r="http://schemas.openxmlformats.org/officeDocument/2006/relationships" id="270" r:id="R4b64b00fdddf4190"/>
-    <p:sldId xmlns:r="http://schemas.openxmlformats.org/officeDocument/2006/relationships" id="271" r:id="R195be5672bff4494"/>
-    <p:sldId xmlns:r="http://schemas.openxmlformats.org/officeDocument/2006/relationships" id="272" r:id="Redd6f8bc3abd41a6"/>
-    <p:sldId xmlns:r="http://schemas.openxmlformats.org/officeDocument/2006/relationships" id="273" r:id="Rb8aac2ef482f4ed8"/>
-    <p:sldId xmlns:r="http://schemas.openxmlformats.org/officeDocument/2006/relationships" id="274" r:id="R459aed9e7a664b0f"/>
-    <p:sldId xmlns:r="http://schemas.openxmlformats.org/officeDocument/2006/relationships" id="275" r:id="Rbed18de643ca4605"/>
-    <p:sldId xmlns:r="http://schemas.openxmlformats.org/officeDocument/2006/relationships" id="276" r:id="R93d9b60fbd9b4f12"/>
-    <p:sldId xmlns:r="http://schemas.openxmlformats.org/officeDocument/2006/relationships" id="277" r:id="R1ffe015f859c47d2"/>
-    <p:sldId xmlns:r="http://schemas.openxmlformats.org/officeDocument/2006/relationships" id="278" r:id="R1e1b47c0358b47e9"/>
+    <p:sldId xmlns:r="http://schemas.openxmlformats.org/officeDocument/2006/relationships" id="256" r:id="R64a0b895f60d43d7"/>
+    <p:sldId xmlns:r="http://schemas.openxmlformats.org/officeDocument/2006/relationships" id="257" r:id="Rcf56bdb3142347a3"/>
+    <p:sldId xmlns:r="http://schemas.openxmlformats.org/officeDocument/2006/relationships" id="258" r:id="R2627ad1b2b1c472e"/>
+    <p:sldId xmlns:r="http://schemas.openxmlformats.org/officeDocument/2006/relationships" id="259" r:id="R21dd63d41f554f17"/>
+    <p:sldId xmlns:r="http://schemas.openxmlformats.org/officeDocument/2006/relationships" id="260" r:id="Reec29f75aab24b18"/>
+    <p:sldId xmlns:r="http://schemas.openxmlformats.org/officeDocument/2006/relationships" id="261" r:id="R18f7dc703779411d"/>
+    <p:sldId xmlns:r="http://schemas.openxmlformats.org/officeDocument/2006/relationships" id="262" r:id="R7c8eac0728184eda"/>
+    <p:sldId xmlns:r="http://schemas.openxmlformats.org/officeDocument/2006/relationships" id="263" r:id="Rea076357074d4f3d"/>
+    <p:sldId xmlns:r="http://schemas.openxmlformats.org/officeDocument/2006/relationships" id="264" r:id="R7036e03838eb4e26"/>
+    <p:sldId xmlns:r="http://schemas.openxmlformats.org/officeDocument/2006/relationships" id="265" r:id="Rda968df1c47f4872"/>
+    <p:sldId xmlns:r="http://schemas.openxmlformats.org/officeDocument/2006/relationships" id="266" r:id="R171bca6c42fb49e7"/>
+    <p:sldId xmlns:r="http://schemas.openxmlformats.org/officeDocument/2006/relationships" id="267" r:id="Rdb0e918b54854141"/>
+    <p:sldId xmlns:r="http://schemas.openxmlformats.org/officeDocument/2006/relationships" id="268" r:id="Rca78da6c74cf4aec"/>
+    <p:sldId xmlns:r="http://schemas.openxmlformats.org/officeDocument/2006/relationships" id="269" r:id="Re65de40e0dab4039"/>
+    <p:sldId xmlns:r="http://schemas.openxmlformats.org/officeDocument/2006/relationships" id="270" r:id="R9069a4a684054a9a"/>
+    <p:sldId xmlns:r="http://schemas.openxmlformats.org/officeDocument/2006/relationships" id="271" r:id="Rdb775d1ece5c48ff"/>
+    <p:sldId xmlns:r="http://schemas.openxmlformats.org/officeDocument/2006/relationships" id="272" r:id="R4c2a24bfa75c455b"/>
+    <p:sldId xmlns:r="http://schemas.openxmlformats.org/officeDocument/2006/relationships" id="273" r:id="R9c3de176d8f94919"/>
+    <p:sldId xmlns:r="http://schemas.openxmlformats.org/officeDocument/2006/relationships" id="274" r:id="R4927b9bc20584b6b"/>
+    <p:sldId xmlns:r="http://schemas.openxmlformats.org/officeDocument/2006/relationships" id="275" r:id="R672874fe83e74d3a"/>
+    <p:sldId xmlns:r="http://schemas.openxmlformats.org/officeDocument/2006/relationships" id="276" r:id="R4fe27c96825d42cc"/>
+    <p:sldId xmlns:r="http://schemas.openxmlformats.org/officeDocument/2006/relationships" id="277" r:id="R3a637b7547144e7f"/>
+    <p:sldId xmlns:r="http://schemas.openxmlformats.org/officeDocument/2006/relationships" id="278" r:id="R54adf2012fc844be"/>
   </p:sldIdLst>
   <p:sldSz cx="12191675" cy="6858000"/>
   <p:notesSz cx="6858000" cy="9144000"/>
   <p:embeddedFontLst>
     <p:embeddedFont>
       <p:font typeface="Play"/>
-      <p:regular xmlns:r="http://schemas.openxmlformats.org/officeDocument/2006/relationships" r:id="R7376554f41e24b27"/>
-      <p:bold xmlns:r="http://schemas.openxmlformats.org/officeDocument/2006/relationships" r:id="R149bde22ffe64364"/>
+      <p:regular xmlns:r="http://schemas.openxmlformats.org/officeDocument/2006/relationships" r:id="Rc8562be4e5084bc3"/>
+      <p:bold xmlns:r="http://schemas.openxmlformats.org/officeDocument/2006/relationships" r:id="R39df1cb726a24622"/>
     </p:embeddedFont>
   </p:embeddedFontLst>
   <p:defaultTextStyle>
@@ -640,7 +640,7 @@
               <a:buNone/>
             </a:pPr>
             <a:r>
-              <a:t>REVISIT / SECONDARY USE</a:t>
+              <a:t>REVISIT / REFERENCE</a:t>
             </a:r>
           </a:p>
           <a:p xmlns:a="http://schemas.openxmlformats.org/drawingml/2006/main">
@@ -696,7 +696,7 @@
               <a:buNone/>
             </a:pPr>
             <a:r>
-              <a:t>Shared weekly packet for Decks 1 and 3:</a:t>
+              <a:t>- Unit 1 Student Handouts 1-4</a:t>
             </a:r>
           </a:p>
           <a:p xmlns:a="http://schemas.openxmlformats.org/drawingml/2006/main">
@@ -710,7 +710,7 @@
               <a:buNone/>
             </a:pPr>
             <a:r>
-              <a:t>- Unit 1 Student Handouts 1-4</a:t>
+              <a:t>- Unit 1 Appendices A-C</a:t>
             </a:r>
           </a:p>
           <a:p xmlns:a="http://schemas.openxmlformats.org/drawingml/2006/main">
@@ -724,7 +724,7 @@
               <a:buNone/>
             </a:pPr>
             <a:r>
-              <a:t>- Unit 1 Appendices A-C</a:t>
+              <a:t/>
             </a:r>
           </a:p>
           <a:p xmlns:a="http://schemas.openxmlformats.org/drawingml/2006/main">
@@ -738,6 +738,48 @@
               <a:buNone/>
             </a:pPr>
             <a:r>
+              <a:t>REQUIRED WEEK 4 MATERIALS</a:t>
+            </a:r>
+          </a:p>
+          <a:p xmlns:a="http://schemas.openxmlformats.org/drawingml/2006/main">
+            <a:pPr marL="0" indent="0" algn="l">
+              <a:spcBef>
+                <a:spcPts val="0"/>
+              </a:spcBef>
+              <a:spcAft>
+                <a:spcPts val="0"/>
+              </a:spcAft>
+              <a:buNone/>
+            </a:pPr>
+            <a:r>
+              <a:t>- Unit 2 Student Handouts 6-13</a:t>
+            </a:r>
+          </a:p>
+          <a:p xmlns:a="http://schemas.openxmlformats.org/drawingml/2006/main">
+            <a:pPr marL="0" indent="0" algn="l">
+              <a:spcBef>
+                <a:spcPts val="0"/>
+              </a:spcBef>
+              <a:spcAft>
+                <a:spcPts val="0"/>
+              </a:spcAft>
+              <a:buNone/>
+            </a:pPr>
+            <a:r>
+              <a:t>- Unit 2 Appendices E-H</a:t>
+            </a:r>
+          </a:p>
+          <a:p xmlns:a="http://schemas.openxmlformats.org/drawingml/2006/main">
+            <a:pPr marL="0" indent="0" algn="l">
+              <a:spcBef>
+                <a:spcPts val="0"/>
+              </a:spcBef>
+              <a:spcAft>
+                <a:spcPts val="0"/>
+              </a:spcAft>
+              <a:buNone/>
+            </a:pPr>
+            <a:r>
               <a:t/>
             </a:r>
           </a:p>
@@ -752,7 +794,7 @@
               <a:buNone/>
             </a:pPr>
             <a:r>
-              <a:t>REQUIRED WEEK 4 MATERIALS</a:t>
+              <a:t>OPTIONAL / TEACHER REFERENCE FOR WEEK 4</a:t>
             </a:r>
           </a:p>
           <a:p xmlns:a="http://schemas.openxmlformats.org/drawingml/2006/main">
@@ -766,7 +808,7 @@
               <a:buNone/>
             </a:pPr>
             <a:r>
-              <a:t>Shared weekly packet with Deck 5:</a:t>
+              <a:t>- Unit 2 Appendices I-J</a:t>
             </a:r>
           </a:p>
           <a:p xmlns:a="http://schemas.openxmlformats.org/drawingml/2006/main">
@@ -780,7 +822,7 @@
               <a:buNone/>
             </a:pPr>
             <a:r>
-              <a:t>- Unit 2 Student Handouts 6-13</a:t>
+              <a:t>- District-supplied approval and safety forms as applicable</a:t>
             </a:r>
           </a:p>
           <a:p xmlns:a="http://schemas.openxmlformats.org/drawingml/2006/main">
@@ -794,7 +836,7 @@
               <a:buNone/>
             </a:pPr>
             <a:r>
-              <a:t>- Unit 2 Appendices E-H</a:t>
+              <a:t/>
             </a:r>
           </a:p>
           <a:p xmlns:a="http://schemas.openxmlformats.org/drawingml/2006/main">
@@ -808,7 +850,7 @@
               <a:buNone/>
             </a:pPr>
             <a:r>
-              <a:t/>
+              <a:t>RESOURCE ALIGNMENT</a:t>
             </a:r>
           </a:p>
           <a:p xmlns:a="http://schemas.openxmlformats.org/drawingml/2006/main">
@@ -822,77 +864,7 @@
               <a:buNone/>
             </a:pPr>
             <a:r>
-              <a:t>OPTIONAL / TEACHER REFERENCE FOR WEEK 4</a:t>
-            </a:r>
-          </a:p>
-          <a:p xmlns:a="http://schemas.openxmlformats.org/drawingml/2006/main">
-            <a:pPr marL="0" indent="0" algn="l">
-              <a:spcBef>
-                <a:spcPts val="0"/>
-              </a:spcBef>
-              <a:spcAft>
-                <a:spcPts val="0"/>
-              </a:spcAft>
-              <a:buNone/>
-            </a:pPr>
-            <a:r>
-              <a:t>- Unit 2 Appendices I-J</a:t>
-            </a:r>
-          </a:p>
-          <a:p xmlns:a="http://schemas.openxmlformats.org/drawingml/2006/main">
-            <a:pPr marL="0" indent="0" algn="l">
-              <a:spcBef>
-                <a:spcPts val="0"/>
-              </a:spcBef>
-              <a:spcAft>
-                <a:spcPts val="0"/>
-              </a:spcAft>
-              <a:buNone/>
-            </a:pPr>
-            <a:r>
-              <a:t>- District-supplied approval, safety, human-participant, privacy, media, fieldwork, equipment, chemical, drone, IRB/SRC, or other local forms as applicable</a:t>
-            </a:r>
-          </a:p>
-          <a:p xmlns:a="http://schemas.openxmlformats.org/drawingml/2006/main">
-            <a:pPr marL="0" indent="0" algn="l">
-              <a:spcBef>
-                <a:spcPts val="0"/>
-              </a:spcBef>
-              <a:spcAft>
-                <a:spcPts val="0"/>
-              </a:spcAft>
-              <a:buNone/>
-            </a:pPr>
-            <a:r>
-              <a:t/>
-            </a:r>
-          </a:p>
-          <a:p xmlns:a="http://schemas.openxmlformats.org/drawingml/2006/main">
-            <a:pPr marL="0" indent="0" algn="l">
-              <a:spcBef>
-                <a:spcPts val="0"/>
-              </a:spcBef>
-              <a:spcAft>
-                <a:spcPts val="0"/>
-              </a:spcAft>
-              <a:buNone/>
-            </a:pPr>
-            <a:r>
-              <a:t>RESOURCE ALIGNMENT</a:t>
-            </a:r>
-          </a:p>
-          <a:p xmlns:a="http://schemas.openxmlformats.org/drawingml/2006/main">
-            <a:pPr marL="0" indent="0" algn="l">
-              <a:spcBef>
-                <a:spcPts val="0"/>
-              </a:spcBef>
-              <a:spcAft>
-                <a:spcPts val="0"/>
-              </a:spcAft>
-              <a:buNone/>
-            </a:pPr>
-            <a:r>
-              <a:t>Introduce ethics and integrity as course culture in Week 1. Revisit this deck in Week 4 before the Project Approval Tracker is used for the final project decision.</a:t>
+              <a:t>Introduce ethics and integrity as course culture in Week 1. Revisit selected safety and ethics content in Week 4 before the Project Approval Tracker records the final project decision.</a:t>
             </a:r>
           </a:p>
         </p:txBody>
@@ -2986,7 +2958,7 @@
   </p:cSld>
   <p:clrMap bg1="lt1" tx1="dk1" bg2="dk2" tx2="lt2" accent1="accent1" accent2="accent2" accent3="accent3" accent4="accent4" accent5="accent5" accent6="accent6" hlink="hlink" folHlink="folHlink"/>
   <p:sldLayoutIdLst>
-    <p:sldLayoutId xmlns:r="http://schemas.openxmlformats.org/officeDocument/2006/relationships" id="2147483649" r:id="R3fdeb2f2400a4e56"/>
+    <p:sldLayoutId xmlns:r="http://schemas.openxmlformats.org/officeDocument/2006/relationships" id="2147483649" r:id="R0b6e04144ae34a29"/>
   </p:sldLayoutIdLst>
   <p:hf sldNum="0" hdr="0" ftr="0" dt="0"/>
   <p:txStyles>
@@ -4109,7 +4081,7 @@
           <p:nvPr/>
         </p:nvPicPr>
         <p:blipFill rotWithShape="1">
-          <a:blip xmlns:r="http://schemas.openxmlformats.org/officeDocument/2006/relationships" xmlns:a="http://schemas.openxmlformats.org/drawingml/2006/main" r:embed="Rc92034540d684f58">
+          <a:blip xmlns:r="http://schemas.openxmlformats.org/officeDocument/2006/relationships" xmlns:a="http://schemas.openxmlformats.org/drawingml/2006/main" r:embed="Rcd919877461240f1">
             <a:alphaModFix/>
           </a:blip>
           <a:srcRect xmlns:a="http://schemas.openxmlformats.org/drawingml/2006/main" l="0" t="0" r="0" b="0"/>
@@ -4837,7 +4809,7 @@
       </p:sp>
       <p:cxnSp>
         <p:nvCxnSpPr>
-          <p:cNvPr id="208" name="Google Shape;198;p12"/>
+          <p:cNvPr id="217" name="Google Shape;198;p12"/>
           <p:cNvCxnSpPr/>
           <p:nvPr/>
         </p:nvCxnSpPr>
@@ -5461,7 +5433,7 @@
       </p:sp>
       <p:cxnSp>
         <p:nvCxnSpPr>
-          <p:cNvPr id="229" name="Google Shape;213;p13"/>
+          <p:cNvPr id="238" name="Google Shape;213;p13"/>
           <p:cNvCxnSpPr/>
           <p:nvPr/>
         </p:nvCxnSpPr>
@@ -6566,7 +6538,7 @@
       </p:sp>
       <p:cxnSp>
         <p:nvCxnSpPr>
-          <p:cNvPr id="244" name="Google Shape;234;p14"/>
+          <p:cNvPr id="253" name="Google Shape;234;p14"/>
           <p:cNvCxnSpPr/>
           <p:nvPr/>
         </p:nvCxnSpPr>
@@ -7212,7 +7184,7 @@
       </p:sp>
       <p:cxnSp>
         <p:nvCxnSpPr>
-          <p:cNvPr id="259" name="Google Shape;249;p15"/>
+          <p:cNvPr id="268" name="Google Shape;249;p15"/>
           <p:cNvCxnSpPr/>
           <p:nvPr/>
         </p:nvCxnSpPr>
@@ -7902,7 +7874,7 @@
       </p:sp>
       <p:cxnSp>
         <p:nvCxnSpPr>
-          <p:cNvPr id="279" name="Google Shape;264;p16"/>
+          <p:cNvPr id="288" name="Google Shape;264;p16"/>
           <p:cNvCxnSpPr/>
           <p:nvPr/>
         </p:nvCxnSpPr>
@@ -9000,7 +8972,7 @@
       </p:sp>
       <p:cxnSp>
         <p:nvCxnSpPr>
-          <p:cNvPr id="317" name="Google Shape;284;p17"/>
+          <p:cNvPr id="346" name="Google Shape;284;p17"/>
           <p:cNvCxnSpPr/>
           <p:nvPr/>
         </p:nvCxnSpPr>
@@ -9204,7 +9176,7 @@
       </p:sp>
       <p:cxnSp>
         <p:nvCxnSpPr>
-          <p:cNvPr id="321" name="Google Shape;288;p17"/>
+          <p:cNvPr id="350" name="Google Shape;288;p17"/>
           <p:cNvCxnSpPr/>
           <p:nvPr/>
         </p:nvCxnSpPr>
@@ -9408,7 +9380,7 @@
       </p:sp>
       <p:cxnSp>
         <p:nvCxnSpPr>
-          <p:cNvPr id="325" name="Google Shape;292;p17"/>
+          <p:cNvPr id="354" name="Google Shape;292;p17"/>
           <p:cNvCxnSpPr/>
           <p:nvPr/>
         </p:nvCxnSpPr>
@@ -9612,7 +9584,7 @@
       </p:sp>
       <p:cxnSp>
         <p:nvCxnSpPr>
-          <p:cNvPr id="329" name="Google Shape;296;p17"/>
+          <p:cNvPr id="358" name="Google Shape;296;p17"/>
           <p:cNvCxnSpPr/>
           <p:nvPr/>
         </p:nvCxnSpPr>
@@ -9816,7 +9788,7 @@
       </p:sp>
       <p:cxnSp>
         <p:nvCxnSpPr>
-          <p:cNvPr id="333" name="Google Shape;300;p17"/>
+          <p:cNvPr id="362" name="Google Shape;300;p17"/>
           <p:cNvCxnSpPr/>
           <p:nvPr/>
         </p:nvCxnSpPr>
@@ -10020,7 +9992,7 @@
       </p:sp>
       <p:cxnSp>
         <p:nvCxnSpPr>
-          <p:cNvPr id="337" name="Google Shape;304;p17"/>
+          <p:cNvPr id="366" name="Google Shape;304;p17"/>
           <p:cNvCxnSpPr/>
           <p:nvPr/>
         </p:nvCxnSpPr>
@@ -10784,7 +10756,7 @@
       </p:sp>
       <p:cxnSp>
         <p:nvCxnSpPr>
-          <p:cNvPr id="338" name="Google Shape;322;p18"/>
+          <p:cNvPr id="347" name="Google Shape;322;p18"/>
           <p:cNvCxnSpPr/>
           <p:nvPr/>
         </p:nvCxnSpPr>
@@ -11889,7 +11861,7 @@
       </p:sp>
       <p:cxnSp>
         <p:nvCxnSpPr>
-          <p:cNvPr id="355" name="Google Shape;343;p19"/>
+          <p:cNvPr id="364" name="Google Shape;343;p19"/>
           <p:cNvCxnSpPr/>
           <p:nvPr/>
         </p:nvCxnSpPr>
@@ -12673,7 +12645,7 @@
       </p:sp>
       <p:cxnSp>
         <p:nvCxnSpPr>
-          <p:cNvPr id="370" name="Google Shape;360;p20"/>
+          <p:cNvPr id="379" name="Google Shape;360;p20"/>
           <p:cNvCxnSpPr/>
           <p:nvPr/>
         </p:nvCxnSpPr>
@@ -13363,7 +13335,7 @@
       </p:sp>
       <p:cxnSp>
         <p:nvCxnSpPr>
-          <p:cNvPr id="385" name="Google Shape;375;p21"/>
+          <p:cNvPr id="394" name="Google Shape;375;p21"/>
           <p:cNvCxnSpPr/>
           <p:nvPr/>
         </p:nvCxnSpPr>
@@ -14097,7 +14069,7 @@
       </p:sp>
       <p:cxnSp>
         <p:nvCxnSpPr>
-          <p:cNvPr id="51" name="Google Shape;36;p4"/>
+          <p:cNvPr id="60" name="Google Shape;36;p4"/>
           <p:cNvCxnSpPr/>
           <p:nvPr/>
         </p:nvCxnSpPr>
@@ -14979,7 +14951,7 @@
       </p:sp>
       <p:cxnSp>
         <p:nvCxnSpPr>
-          <p:cNvPr id="405" name="Google Shape;390;p22"/>
+          <p:cNvPr id="414" name="Google Shape;390;p22"/>
           <p:cNvCxnSpPr/>
           <p:nvPr/>
         </p:nvCxnSpPr>
@@ -16137,7 +16109,7 @@
       </p:sp>
       <p:cxnSp>
         <p:nvCxnSpPr>
-          <p:cNvPr id="422" name="Google Shape;410;p23"/>
+          <p:cNvPr id="431" name="Google Shape;410;p23"/>
           <p:cNvCxnSpPr/>
           <p:nvPr/>
         </p:nvCxnSpPr>
@@ -16877,7 +16849,7 @@
       </p:sp>
       <p:cxnSp>
         <p:nvCxnSpPr>
-          <p:cNvPr id="442" name="Google Shape;427;p24"/>
+          <p:cNvPr id="451" name="Google Shape;427;p24"/>
           <p:cNvCxnSpPr/>
           <p:nvPr/>
         </p:nvCxnSpPr>
@@ -17894,7 +17866,7 @@
       </p:sp>
       <p:cxnSp>
         <p:nvCxnSpPr>
-          <p:cNvPr id="459" name="Google Shape;447;p25"/>
+          <p:cNvPr id="468" name="Google Shape;447;p25"/>
           <p:cNvCxnSpPr/>
           <p:nvPr/>
         </p:nvCxnSpPr>
@@ -18628,7 +18600,7 @@
       </p:sp>
       <p:cxnSp>
         <p:nvCxnSpPr>
-          <p:cNvPr id="77" name="Google Shape;56;p5"/>
+          <p:cNvPr id="86" name="Google Shape;56;p5"/>
           <p:cNvCxnSpPr/>
           <p:nvPr/>
         </p:nvCxnSpPr>
@@ -19868,7 +19840,7 @@
       </p:sp>
       <p:cxnSp>
         <p:nvCxnSpPr>
-          <p:cNvPr id="92" name="Google Shape;82;p6"/>
+          <p:cNvPr id="101" name="Google Shape;82;p6"/>
           <p:cNvCxnSpPr/>
           <p:nvPr/>
         </p:nvCxnSpPr>
@@ -20536,7 +20508,7 @@
       </p:sp>
       <p:cxnSp>
         <p:nvCxnSpPr>
-          <p:cNvPr id="109" name="Google Shape;97;p7"/>
+          <p:cNvPr id="118" name="Google Shape;97;p7"/>
           <p:cNvCxnSpPr/>
           <p:nvPr/>
         </p:nvCxnSpPr>
@@ -21320,7 +21292,7 @@
       </p:sp>
       <p:cxnSp>
         <p:nvCxnSpPr>
-          <p:cNvPr id="129" name="Google Shape;114;p8"/>
+          <p:cNvPr id="138" name="Google Shape;114;p8"/>
           <p:cNvCxnSpPr/>
           <p:nvPr/>
         </p:nvCxnSpPr>
@@ -22472,7 +22444,7 @@
       </p:sp>
       <p:cxnSp>
         <p:nvCxnSpPr>
-          <p:cNvPr id="144" name="Google Shape;134;p9"/>
+          <p:cNvPr id="153" name="Google Shape;134;p9"/>
           <p:cNvCxnSpPr/>
           <p:nvPr/>
         </p:nvCxnSpPr>
@@ -23118,7 +23090,7 @@
       </p:sp>
       <p:cxnSp>
         <p:nvCxnSpPr>
-          <p:cNvPr id="176" name="Google Shape;149;p10"/>
+          <p:cNvPr id="185" name="Google Shape;149;p10"/>
           <p:cNvCxnSpPr/>
           <p:nvPr/>
         </p:nvCxnSpPr>
@@ -24716,7 +24688,7 @@
       </p:sp>
       <p:cxnSp>
         <p:nvCxnSpPr>
-          <p:cNvPr id="193" name="Google Shape;181;p11"/>
+          <p:cNvPr id="202" name="Google Shape;181;p11"/>
           <p:cNvCxnSpPr/>
           <p:nvPr/>
         </p:nvCxnSpPr>
